--- a/cardnews-template.pptx
+++ b/cardnews-template.pptx
@@ -1353,7 +1353,7 @@
           <a:p>
             <a:fld id="{7CF14326-B176-4471-95AA-F1BE8DCB13F8}" type="datetimeFigureOut">
               <a:rPr lang="ko-KR" altLang="en-US" smtClean="0"/>
-              <a:t>2026-07-02</a:t>
+              <a:t>2026-07-03</a:t>
             </a:fld>
             <a:endParaRPr lang="ko-KR" altLang="en-US"/>
           </a:p>
@@ -2300,6 +2300,90 @@
           </a:p>
         </p:txBody>
       </p:sp>
+      <p:sp>
+        <p:nvSpPr>
+          <p:cNvPr id="3" name="TextBox 2">
+            <a:extLst>
+              <a:ext uri="{FF2B5EF4-FFF2-40B4-BE49-F238E27FC236}">
+                <a16:creationId xmlns:a16="http://schemas.microsoft.com/office/drawing/2014/main" id="{0E2D392C-3C40-95A1-C67D-4FC2D407D115}"/>
+              </a:ext>
+            </a:extLst>
+          </p:cNvPr>
+          <p:cNvSpPr txBox="1"/>
+          <p:nvPr/>
+        </p:nvSpPr>
+        <p:spPr>
+          <a:xfrm>
+            <a:off x="2571750" y="6474964"/>
+            <a:ext cx="2211750" cy="153888"/>
+          </a:xfrm>
+          <a:prstGeom prst="rect">
+            <a:avLst/>
+          </a:prstGeom>
+          <a:noFill/>
+          <a:ln>
+            <a:noFill/>
+          </a:ln>
+        </p:spPr>
+        <p:txBody>
+          <a:bodyPr wrap="square" lIns="0" tIns="0" rIns="0" bIns="0" rtlCol="0" anchor="t">
+            <a:spAutoFit/>
+          </a:bodyPr>
+          <a:lstStyle/>
+          <a:p>
+            <a:pPr algn="r"/>
+            <a:r>
+              <a:rPr lang="ko-KR" altLang="en-US" sz="1000">
+                <a:solidFill>
+                  <a:schemeClr val="bg1">
+                    <a:lumMod val="50000"/>
+                  </a:schemeClr>
+                </a:solidFill>
+                <a:latin typeface="Pretendard Medium" panose="02000603000000020004" pitchFamily="50" charset="-127"/>
+                <a:ea typeface="Pretendard Medium" panose="02000603000000020004" pitchFamily="50" charset="-127"/>
+                <a:cs typeface="Pretendard Medium" panose="02000603000000020004" pitchFamily="50" charset="-127"/>
+              </a:rPr>
+              <a:t>이미지 출처</a:t>
+            </a:r>
+            <a:r>
+              <a:rPr lang="en-US" altLang="ko-KR" sz="1000">
+                <a:solidFill>
+                  <a:schemeClr val="bg1">
+                    <a:lumMod val="50000"/>
+                  </a:schemeClr>
+                </a:solidFill>
+                <a:latin typeface="Pretendard Medium" panose="02000603000000020004" pitchFamily="50" charset="-127"/>
+                <a:ea typeface="Pretendard Medium" panose="02000603000000020004" pitchFamily="50" charset="-127"/>
+                <a:cs typeface="Pretendard Medium" panose="02000603000000020004" pitchFamily="50" charset="-127"/>
+              </a:rPr>
+              <a:t>: AI </a:t>
+            </a:r>
+            <a:r>
+              <a:rPr lang="ko-KR" altLang="en-US" sz="1000">
+                <a:solidFill>
+                  <a:schemeClr val="bg1">
+                    <a:lumMod val="50000"/>
+                  </a:schemeClr>
+                </a:solidFill>
+                <a:latin typeface="Pretendard Medium" panose="02000603000000020004" pitchFamily="50" charset="-127"/>
+                <a:ea typeface="Pretendard Medium" panose="02000603000000020004" pitchFamily="50" charset="-127"/>
+                <a:cs typeface="Pretendard Medium" panose="02000603000000020004" pitchFamily="50" charset="-127"/>
+              </a:rPr>
+              <a:t>생성</a:t>
+            </a:r>
+            <a:endParaRPr lang="en-US" altLang="ko-KR" sz="1000">
+              <a:solidFill>
+                <a:schemeClr val="bg1">
+                  <a:lumMod val="50000"/>
+                </a:schemeClr>
+              </a:solidFill>
+              <a:latin typeface="Pretendard Medium" panose="02000603000000020004" pitchFamily="50" charset="-127"/>
+              <a:ea typeface="Pretendard Medium" panose="02000603000000020004" pitchFamily="50" charset="-127"/>
+              <a:cs typeface="Pretendard Medium" panose="02000603000000020004" pitchFamily="50" charset="-127"/>
+            </a:endParaRPr>
+          </a:p>
+        </p:txBody>
+      </p:sp>
     </p:spTree>
     <p:extLst>
       <p:ext uri="{BB962C8B-B14F-4D97-AF65-F5344CB8AC3E}">
@@ -2936,10 +3020,10 @@
       </p:sp>
       <p:sp>
         <p:nvSpPr>
-          <p:cNvPr id="14" name="TextBox 13">
+          <p:cNvPr id="3" name="TextBox 2">
             <a:extLst>
               <a:ext uri="{FF2B5EF4-FFF2-40B4-BE49-F238E27FC236}">
-                <a16:creationId xmlns:a16="http://schemas.microsoft.com/office/drawing/2014/main" id="{7F3C7E69-7BDC-6A05-5E94-398D36A6C042}"/>
+                <a16:creationId xmlns:a16="http://schemas.microsoft.com/office/drawing/2014/main" id="{738D9A2E-81F6-A31D-2446-FDEFF81D7164}"/>
               </a:ext>
             </a:extLst>
           </p:cNvPr>
@@ -2948,8 +3032,8 @@
         </p:nvSpPr>
         <p:spPr>
           <a:xfrm>
-            <a:off x="1503431" y="6474964"/>
-            <a:ext cx="3280069" cy="153888"/>
+            <a:off x="2571750" y="6474964"/>
+            <a:ext cx="2211750" cy="153888"/>
           </a:xfrm>
           <a:prstGeom prst="rect">
             <a:avLst/>
@@ -2967,70 +3051,54 @@
           <a:p>
             <a:pPr algn="r"/>
             <a:r>
-              <a:rPr lang="en-US" altLang="ko-KR" sz="1000">
+              <a:rPr lang="ko-KR" altLang="en-US" sz="1000">
                 <a:solidFill>
                   <a:schemeClr val="bg1">
-                    <a:lumMod val="65000"/>
+                    <a:lumMod val="50000"/>
                   </a:schemeClr>
                 </a:solidFill>
                 <a:latin typeface="Pretendard Medium" panose="02000603000000020004" pitchFamily="50" charset="-127"/>
                 <a:ea typeface="Pretendard Medium" panose="02000603000000020004" pitchFamily="50" charset="-127"/>
                 <a:cs typeface="Pretendard Medium" panose="02000603000000020004" pitchFamily="50" charset="-127"/>
               </a:rPr>
-              <a:t>AI</a:t>
-            </a:r>
-            <a:r>
-              <a:rPr lang="ko-KR" altLang="en-US" sz="1000">
+              <a:t>이미지 출처</a:t>
+            </a:r>
+            <a:r>
+              <a:rPr lang="en-US" altLang="ko-KR" sz="1000">
                 <a:solidFill>
                   <a:schemeClr val="bg1">
-                    <a:lumMod val="65000"/>
+                    <a:lumMod val="50000"/>
                   </a:schemeClr>
                 </a:solidFill>
                 <a:latin typeface="Pretendard Medium" panose="02000603000000020004" pitchFamily="50" charset="-127"/>
                 <a:ea typeface="Pretendard Medium" panose="02000603000000020004" pitchFamily="50" charset="-127"/>
                 <a:cs typeface="Pretendard Medium" panose="02000603000000020004" pitchFamily="50" charset="-127"/>
               </a:rPr>
-              <a:t>로 생성된 이미지입니다 </a:t>
-            </a:r>
-            <a:r>
-              <a:rPr lang="en-US" altLang="ko-KR" sz="1000">
+              <a:t>: AI </a:t>
+            </a:r>
+            <a:r>
+              <a:rPr lang="ko-KR" altLang="en-US" sz="1000">
                 <a:solidFill>
                   <a:schemeClr val="bg1">
-                    <a:lumMod val="65000"/>
+                    <a:lumMod val="50000"/>
                   </a:schemeClr>
                 </a:solidFill>
                 <a:latin typeface="Pretendard Medium" panose="02000603000000020004" pitchFamily="50" charset="-127"/>
                 <a:ea typeface="Pretendard Medium" panose="02000603000000020004" pitchFamily="50" charset="-127"/>
                 <a:cs typeface="Pretendard Medium" panose="02000603000000020004" pitchFamily="50" charset="-127"/>
               </a:rPr>
-              <a:t>/ </a:t>
-            </a:r>
-            <a:r>
-              <a:rPr lang="ko-KR" altLang="en-US" sz="1000">
-                <a:solidFill>
-                  <a:schemeClr val="bg1">
-                    <a:lumMod val="65000"/>
-                  </a:schemeClr>
-                </a:solidFill>
-                <a:latin typeface="Pretendard Medium" panose="02000603000000020004" pitchFamily="50" charset="-127"/>
-                <a:ea typeface="Pretendard Medium" panose="02000603000000020004" pitchFamily="50" charset="-127"/>
-                <a:cs typeface="Pretendard Medium" panose="02000603000000020004" pitchFamily="50" charset="-127"/>
-              </a:rPr>
-              <a:t>이미지 출처</a:t>
-            </a:r>
-            <a:r>
-              <a:rPr lang="en-US" altLang="ko-KR" sz="1000">
-                <a:solidFill>
-                  <a:schemeClr val="bg1">
-                    <a:lumMod val="65000"/>
-                  </a:schemeClr>
-                </a:solidFill>
-                <a:latin typeface="Pretendard Medium" panose="02000603000000020004" pitchFamily="50" charset="-127"/>
-                <a:ea typeface="Pretendard Medium" panose="02000603000000020004" pitchFamily="50" charset="-127"/>
-                <a:cs typeface="Pretendard Medium" panose="02000603000000020004" pitchFamily="50" charset="-127"/>
-              </a:rPr>
-              <a:t>: xxx</a:t>
-            </a:r>
+              <a:t>생성</a:t>
+            </a:r>
+            <a:endParaRPr lang="en-US" altLang="ko-KR" sz="1000">
+              <a:solidFill>
+                <a:schemeClr val="bg1">
+                  <a:lumMod val="50000"/>
+                </a:schemeClr>
+              </a:solidFill>
+              <a:latin typeface="Pretendard Medium" panose="02000603000000020004" pitchFamily="50" charset="-127"/>
+              <a:ea typeface="Pretendard Medium" panose="02000603000000020004" pitchFamily="50" charset="-127"/>
+              <a:cs typeface="Pretendard Medium" panose="02000603000000020004" pitchFamily="50" charset="-127"/>
+            </a:endParaRPr>
           </a:p>
         </p:txBody>
       </p:sp>
@@ -3477,10 +3545,10 @@
       </p:sp>
       <p:sp>
         <p:nvSpPr>
-          <p:cNvPr id="5" name="TextBox 4">
+          <p:cNvPr id="6" name="TextBox 5">
             <a:extLst>
               <a:ext uri="{FF2B5EF4-FFF2-40B4-BE49-F238E27FC236}">
-                <a16:creationId xmlns:a16="http://schemas.microsoft.com/office/drawing/2014/main" id="{077278F6-96C8-8631-2176-1152D825D7A0}"/>
+                <a16:creationId xmlns:a16="http://schemas.microsoft.com/office/drawing/2014/main" id="{505F86C6-A825-0ED5-51B3-C22FBF9688E6}"/>
               </a:ext>
             </a:extLst>
           </p:cNvPr>
@@ -3489,8 +3557,8 @@
         </p:nvSpPr>
         <p:spPr>
           <a:xfrm>
-            <a:off x="-1777125" y="2788594"/>
-            <a:ext cx="1597125" cy="285912"/>
+            <a:off x="2571750" y="6474964"/>
+            <a:ext cx="2211750" cy="153888"/>
           </a:xfrm>
           <a:prstGeom prst="rect">
             <a:avLst/>
@@ -3506,41 +3574,65 @@
           </a:bodyPr>
           <a:lstStyle/>
           <a:p>
-            <a:pPr algn="r">
-              <a:lnSpc>
-                <a:spcPct val="150000"/>
-              </a:lnSpc>
-            </a:pPr>
-            <a:r>
-              <a:rPr lang="en-US" altLang="ko-KR" sz="1400">
-                <a:latin typeface="Pretendard Light" panose="02000403000000020004" pitchFamily="50" charset="-127"/>
-                <a:ea typeface="Pretendard Light" panose="02000403000000020004" pitchFamily="50" charset="-127"/>
-                <a:cs typeface="Pretendard Light" panose="02000403000000020004" pitchFamily="50" charset="-127"/>
-              </a:rPr>
-              <a:t>*</a:t>
-            </a:r>
-            <a:r>
-              <a:rPr lang="ko-KR" altLang="en-US" sz="1400">
-                <a:latin typeface="Pretendard Light" panose="02000403000000020004" pitchFamily="50" charset="-127"/>
-                <a:ea typeface="Pretendard Light" panose="02000403000000020004" pitchFamily="50" charset="-127"/>
-                <a:cs typeface="Pretendard Light" panose="02000403000000020004" pitchFamily="50" charset="-127"/>
-              </a:rPr>
-              <a:t>맨 뒤에 이미지 갈기</a:t>
-            </a:r>
-            <a:endParaRPr lang="en-US" altLang="ko-KR" sz="1400">
-              <a:latin typeface="Pretendard Light" panose="02000403000000020004" pitchFamily="50" charset="-127"/>
-              <a:ea typeface="Pretendard Light" panose="02000403000000020004" pitchFamily="50" charset="-127"/>
-              <a:cs typeface="Pretendard Light" panose="02000403000000020004" pitchFamily="50" charset="-127"/>
+            <a:pPr algn="r"/>
+            <a:r>
+              <a:rPr lang="ko-KR" altLang="en-US" sz="1000">
+                <a:solidFill>
+                  <a:schemeClr val="bg1">
+                    <a:lumMod val="50000"/>
+                  </a:schemeClr>
+                </a:solidFill>
+                <a:latin typeface="Pretendard Medium" panose="02000603000000020004" pitchFamily="50" charset="-127"/>
+                <a:ea typeface="Pretendard Medium" panose="02000603000000020004" pitchFamily="50" charset="-127"/>
+                <a:cs typeface="Pretendard Medium" panose="02000603000000020004" pitchFamily="50" charset="-127"/>
+              </a:rPr>
+              <a:t>이미지 출처</a:t>
+            </a:r>
+            <a:r>
+              <a:rPr lang="en-US" altLang="ko-KR" sz="1000">
+                <a:solidFill>
+                  <a:schemeClr val="bg1">
+                    <a:lumMod val="50000"/>
+                  </a:schemeClr>
+                </a:solidFill>
+                <a:latin typeface="Pretendard Medium" panose="02000603000000020004" pitchFamily="50" charset="-127"/>
+                <a:ea typeface="Pretendard Medium" panose="02000603000000020004" pitchFamily="50" charset="-127"/>
+                <a:cs typeface="Pretendard Medium" panose="02000603000000020004" pitchFamily="50" charset="-127"/>
+              </a:rPr>
+              <a:t>: AI </a:t>
+            </a:r>
+            <a:r>
+              <a:rPr lang="ko-KR" altLang="en-US" sz="1000">
+                <a:solidFill>
+                  <a:schemeClr val="bg1">
+                    <a:lumMod val="50000"/>
+                  </a:schemeClr>
+                </a:solidFill>
+                <a:latin typeface="Pretendard Medium" panose="02000603000000020004" pitchFamily="50" charset="-127"/>
+                <a:ea typeface="Pretendard Medium" panose="02000603000000020004" pitchFamily="50" charset="-127"/>
+                <a:cs typeface="Pretendard Medium" panose="02000603000000020004" pitchFamily="50" charset="-127"/>
+              </a:rPr>
+              <a:t>생성</a:t>
+            </a:r>
+            <a:endParaRPr lang="en-US" altLang="ko-KR" sz="1000">
+              <a:solidFill>
+                <a:schemeClr val="bg1">
+                  <a:lumMod val="50000"/>
+                </a:schemeClr>
+              </a:solidFill>
+              <a:latin typeface="Pretendard Medium" panose="02000603000000020004" pitchFamily="50" charset="-127"/>
+              <a:ea typeface="Pretendard Medium" panose="02000603000000020004" pitchFamily="50" charset="-127"/>
+              <a:cs typeface="Pretendard Medium" panose="02000603000000020004" pitchFamily="50" charset="-127"/>
             </a:endParaRPr>
           </a:p>
         </p:txBody>
       </p:sp>
       <p:sp>
         <p:nvSpPr>
-          <p:cNvPr id="2" name="TextBox 1">
+          <p:cNvPr id="7" name="TextBox 6">
             <a:extLst>
               <a:ext uri="{FF2B5EF4-FFF2-40B4-BE49-F238E27FC236}">
-                <a16:creationId xmlns:a16="http://schemas.microsoft.com/office/drawing/2014/main" id="{06525C20-4246-5154-BBF9-9B9DD0D56C7D}"/>
+                <a16:creationId xmlns:a16="http://schemas.microsoft.com/office/drawing/2014/main" id="{A320B568-C55B-B7DC-D26A-13DE224D5B05}"/>
               </a:ext>
             </a:extLst>
           </p:cNvPr>
@@ -3549,8 +3641,8 @@
         </p:nvSpPr>
         <p:spPr>
           <a:xfrm>
-            <a:off x="1503431" y="6474964"/>
-            <a:ext cx="3280069" cy="153888"/>
+            <a:off x="-2518807" y="2788594"/>
+            <a:ext cx="2338807" cy="285912"/>
           </a:xfrm>
           <a:prstGeom prst="rect">
             <a:avLst/>
@@ -3566,72 +3658,32 @@
           </a:bodyPr>
           <a:lstStyle/>
           <a:p>
-            <a:pPr algn="r"/>
-            <a:r>
-              <a:rPr lang="en-US" altLang="ko-KR" sz="1000">
-                <a:solidFill>
-                  <a:schemeClr val="bg1">
-                    <a:lumMod val="65000"/>
-                  </a:schemeClr>
-                </a:solidFill>
-                <a:latin typeface="Pretendard Medium" panose="02000603000000020004" pitchFamily="50" charset="-127"/>
-                <a:ea typeface="Pretendard Medium" panose="02000603000000020004" pitchFamily="50" charset="-127"/>
-                <a:cs typeface="Pretendard Medium" panose="02000603000000020004" pitchFamily="50" charset="-127"/>
-              </a:rPr>
-              <a:t>AI</a:t>
-            </a:r>
-            <a:r>
-              <a:rPr lang="ko-KR" altLang="en-US" sz="1000">
-                <a:solidFill>
-                  <a:schemeClr val="bg1">
-                    <a:lumMod val="65000"/>
-                  </a:schemeClr>
-                </a:solidFill>
-                <a:latin typeface="Pretendard Medium" panose="02000603000000020004" pitchFamily="50" charset="-127"/>
-                <a:ea typeface="Pretendard Medium" panose="02000603000000020004" pitchFamily="50" charset="-127"/>
-                <a:cs typeface="Pretendard Medium" panose="02000603000000020004" pitchFamily="50" charset="-127"/>
-              </a:rPr>
-              <a:t>로 생성된 이미지입니다 </a:t>
-            </a:r>
-            <a:r>
-              <a:rPr lang="en-US" altLang="ko-KR" sz="1000">
-                <a:solidFill>
-                  <a:schemeClr val="bg1">
-                    <a:lumMod val="65000"/>
-                  </a:schemeClr>
-                </a:solidFill>
-                <a:latin typeface="Pretendard Medium" panose="02000603000000020004" pitchFamily="50" charset="-127"/>
-                <a:ea typeface="Pretendard Medium" panose="02000603000000020004" pitchFamily="50" charset="-127"/>
-                <a:cs typeface="Pretendard Medium" panose="02000603000000020004" pitchFamily="50" charset="-127"/>
-              </a:rPr>
-              <a:t>/ </a:t>
-            </a:r>
-            <a:r>
-              <a:rPr lang="ko-KR" altLang="en-US" sz="1000">
-                <a:solidFill>
-                  <a:schemeClr val="bg1">
-                    <a:lumMod val="65000"/>
-                  </a:schemeClr>
-                </a:solidFill>
-                <a:latin typeface="Pretendard Medium" panose="02000603000000020004" pitchFamily="50" charset="-127"/>
-                <a:ea typeface="Pretendard Medium" panose="02000603000000020004" pitchFamily="50" charset="-127"/>
-                <a:cs typeface="Pretendard Medium" panose="02000603000000020004" pitchFamily="50" charset="-127"/>
-              </a:rPr>
-              <a:t>이미지 출처</a:t>
-            </a:r>
-            <a:r>
-              <a:rPr lang="en-US" altLang="ko-KR" sz="1000">
-                <a:solidFill>
-                  <a:schemeClr val="bg1">
-                    <a:lumMod val="65000"/>
-                  </a:schemeClr>
-                </a:solidFill>
-                <a:latin typeface="Pretendard Medium" panose="02000603000000020004" pitchFamily="50" charset="-127"/>
-                <a:ea typeface="Pretendard Medium" panose="02000603000000020004" pitchFamily="50" charset="-127"/>
-                <a:cs typeface="Pretendard Medium" panose="02000603000000020004" pitchFamily="50" charset="-127"/>
-              </a:rPr>
-              <a:t>: xxx</a:t>
-            </a:r>
+            <a:pPr algn="r">
+              <a:lnSpc>
+                <a:spcPct val="150000"/>
+              </a:lnSpc>
+            </a:pPr>
+            <a:r>
+              <a:rPr lang="en-US" altLang="ko-KR" sz="1400">
+                <a:latin typeface="Pretendard Light" panose="02000403000000020004" pitchFamily="50" charset="-127"/>
+                <a:ea typeface="Pretendard Light" panose="02000403000000020004" pitchFamily="50" charset="-127"/>
+                <a:cs typeface="Pretendard Light" panose="02000403000000020004" pitchFamily="50" charset="-127"/>
+              </a:rPr>
+              <a:t>*</a:t>
+            </a:r>
+            <a:r>
+              <a:rPr lang="ko-KR" altLang="en-US" sz="1400">
+                <a:latin typeface="Pretendard Light" panose="02000403000000020004" pitchFamily="50" charset="-127"/>
+                <a:ea typeface="Pretendard Light" panose="02000403000000020004" pitchFamily="50" charset="-127"/>
+                <a:cs typeface="Pretendard Light" panose="02000403000000020004" pitchFamily="50" charset="-127"/>
+              </a:rPr>
+              <a:t>본문 마지막 페이지 이미지 활용</a:t>
+            </a:r>
+            <a:endParaRPr lang="en-US" altLang="ko-KR" sz="1400">
+              <a:latin typeface="Pretendard Light" panose="02000403000000020004" pitchFamily="50" charset="-127"/>
+              <a:ea typeface="Pretendard Light" panose="02000403000000020004" pitchFamily="50" charset="-127"/>
+              <a:cs typeface="Pretendard Light" panose="02000403000000020004" pitchFamily="50" charset="-127"/>
+            </a:endParaRPr>
           </a:p>
         </p:txBody>
       </p:sp>
